--- a/Android_Chinese_Words_Game_App_Defence_English_Template_Polished.pptx
+++ b/Android_Chinese_Words_Game_App_Defence_English_Template_Polished.pptx
@@ -21492,8 +21492,8 @@
         </p:blipFill>
         <p:spPr>
           <a:xfrm>
-            <a:off x="548640" y="1115568"/>
-            <a:ext cx="3711870" cy="3154680"/>
+            <a:off x="322075" y="661912"/>
+            <a:ext cx="4467255" cy="3796674"/>
           </a:xfrm>
           <a:prstGeom prst="rect">
             <a:avLst/>
@@ -21604,7 +21604,7 @@
           <a:p>
             <a:pPr algn="l"/>
             <a:r>
-              <a:rPr sz="1200" b="0">
+              <a:rPr sz="1200" b="0" dirty="0">
                 <a:solidFill>
                   <a:srgbClr val="282E2B"/>
                 </a:solidFill>
@@ -21786,7 +21786,7 @@
           <a:p>
             <a:pPr algn="ctr"/>
             <a:r>
-              <a:rPr sz="1100" b="0">
+              <a:rPr sz="1100" b="0" dirty="0">
                 <a:solidFill>
                   <a:srgbClr val="606A64"/>
                 </a:solidFill>
@@ -24406,16 +24406,16 @@
 
 <file path=customXml/item2.xml><?xml version="1.0" encoding="utf-8"?>
 <?mso-contentType ?>
+<SharedContentType xmlns="Microsoft.SharePoint.Taxonomy.ContentTypeSync" SourceId="9c18f9b8-5ae4-4f0b-a238-a922c51e2dda" ContentTypeId="0x0101005EA864BF41DF8A41860E925F5B29BCF5" PreviousValue="false"/>
+</file>
+
+<file path=customXml/item3.xml><?xml version="1.0" encoding="utf-8"?>
+<?mso-contentType ?>
 <FormTemplates xmlns="http://schemas.microsoft.com/sharepoint/v3/contenttype/forms">
   <Display>DocumentLibraryForm</Display>
   <Edit>DocumentLibraryForm</Edit>
   <New>DocumentLibraryForm</New>
 </FormTemplates>
-</file>
-
-<file path=customXml/item3.xml><?xml version="1.0" encoding="utf-8"?>
-<?mso-contentType ?>
-<SharedContentType xmlns="Microsoft.SharePoint.Taxonomy.ContentTypeSync" SourceId="9c18f9b8-5ae4-4f0b-a238-a922c51e2dda" ContentTypeId="0x0101005EA864BF41DF8A41860E925F5B29BCF5" PreviousValue="false"/>
 </file>
 
 <file path=customXml/itemProps1.xml><?xml version="1.0" encoding="utf-8"?>
@@ -24440,17 +24440,17 @@
 </file>
 
 <file path=customXml/itemProps2.xml><?xml version="1.0" encoding="utf-8"?>
+<ds:datastoreItem xmlns:ds="http://schemas.openxmlformats.org/officeDocument/2006/customXml" ds:itemID="{BF63176E-1483-4C15-BD4B-1EE4D79BE256}">
+  <ds:schemaRefs>
+    <ds:schemaRef ds:uri="Microsoft.SharePoint.Taxonomy.ContentTypeSync"/>
+  </ds:schemaRefs>
+</ds:datastoreItem>
+</file>
+
+<file path=customXml/itemProps3.xml><?xml version="1.0" encoding="utf-8"?>
 <ds:datastoreItem xmlns:ds="http://schemas.openxmlformats.org/officeDocument/2006/customXml" ds:itemID="{88D383BC-4600-4FB3-BB1E-D462881A88AC}">
   <ds:schemaRefs>
     <ds:schemaRef ds:uri="http://schemas.microsoft.com/sharepoint/v3/contenttype/forms"/>
   </ds:schemaRefs>
 </ds:datastoreItem>
-</file>
-
-<file path=customXml/itemProps3.xml><?xml version="1.0" encoding="utf-8"?>
-<ds:datastoreItem xmlns:ds="http://schemas.openxmlformats.org/officeDocument/2006/customXml" ds:itemID="{BF63176E-1483-4C15-BD4B-1EE4D79BE256}">
-  <ds:schemaRefs>
-    <ds:schemaRef ds:uri="Microsoft.SharePoint.Taxonomy.ContentTypeSync"/>
-  </ds:schemaRefs>
-</ds:datastoreItem>
 </file>